--- a/01_每週教學簡報_PPT/ERP_第09週_期中學習評量與證照考點總複習.pptx
+++ b/01_每週教學簡報_PPT/ERP_第09週_期中學習評量與證照考點總複習.pptx
@@ -16411,7 +16411,7 @@
                 </a:solidFill>
                 <a:latin typeface="微軟正黑體"/>
               </a:rPr>
-              <a:t>檔案 1 `sample_data.json`：包含本週真實業務測試情境資料</a:t>
+              <a:t>檔案 1 `sample_data.json`：包含本週模擬業務測試情境資料</a:t>
             </a:r>
           </a:p>
           <a:p>
@@ -16549,7 +16549,7 @@
                 </a:solidFill>
                 <a:latin typeface="微軟正黑體"/>
               </a:rPr>
-              <a:t>💡 關鍵提點：現在請全班開啟 VS Code，打開本週專案資料夾！</a:t>
+              <a:t>💡 關鍵提點：現在請全班開啟終端機或 Antigravity，進入本週專案資料夾！</a:t>
             </a:r>
           </a:p>
         </p:txBody>
@@ -16782,7 +16782,7 @@
                 </a:solidFill>
                 <a:latin typeface="微軟正黑體"/>
               </a:rPr>
-              <a:t>載入資料：透過 `json.load()` 讀取真實業務單據陣列</a:t>
+              <a:t>載入資料：透過 `json.load()` 讀取模擬業務單據陣列</a:t>
             </a:r>
           </a:p>
           <a:p>
@@ -17181,7 +17181,7 @@
                 </a:solidFill>
                 <a:latin typeface="微軟正黑體"/>
               </a:rPr>
-              <a:t>步驟 1：在 VS Code 終端機切換目錄至第 09 週資料夾</a:t>
+              <a:t>步驟 1：在終端機（PowerShell）切換目錄至第 09 週資料夾</a:t>
             </a:r>
           </a:p>
           <a:p>
@@ -17237,7 +17237,7 @@
                 </a:solidFill>
                 <a:latin typeface="微軟正黑體"/>
               </a:rPr>
-              <a:t>步驟 3：依投影片指引補齊運算式與邏輯判斷條件</a:t>
+              <a:t>步驟 3：依投影片指引補齊運算式與邏輯判斷條件（或請 Antigravity 協同編寫）</a:t>
             </a:r>
           </a:p>
           <a:p>
@@ -17265,7 +17265,7 @@
                 </a:solidFill>
                 <a:latin typeface="微軟正黑體"/>
               </a:rPr>
-              <a:t>步驟 4：儲存檔案 (Ctrl + S)，在終端機執行 `python starter.py` 查看輸出結果</a:t>
+              <a:t>步驟 4：儲存檔案後，在終端機執行 `python starter.py` 查看輸出結果</a:t>
             </a:r>
           </a:p>
           <a:p>
